--- a/slides/Week3.pptx
+++ b/slides/Week3.pptx
@@ -214,7 +214,7 @@
 <file path=ppt/revisionInfo.xml><?xml version="1.0" encoding="utf-8"?>
 <p1510:revInfo xmlns:a="http://schemas.openxmlformats.org/drawingml/2006/main" xmlns:r="http://schemas.openxmlformats.org/officeDocument/2006/relationships" xmlns:p1510="http://schemas.microsoft.com/office/powerpoint/2015/10/main">
   <p1510:revLst>
-    <p1510:client id="{771FF6CD-7868-41AC-8966-D31FF127B0E7}" v="98" dt="2026-01-27T01:26:44.958"/>
+    <p1510:client id="{771FF6CD-7868-41AC-8966-D31FF127B0E7}" v="116" dt="2026-01-27T03:45:09.152"/>
   </p1510:revLst>
 </p1510:revInfo>
 </file>
@@ -224,7 +224,7 @@
   <pc:docChgLst>
     <pc:chgData name="Zhao Jin" userId="cd05a825-544c-438a-9ba1-08e63db50b47" providerId="ADAL" clId="{5DF3A229-1965-414E-AF54-F4C37AC7DF68}"/>
     <pc:docChg chg="undo custSel addSld modSld sldOrd">
-      <pc:chgData name="Zhao Jin" userId="cd05a825-544c-438a-9ba1-08e63db50b47" providerId="ADAL" clId="{5DF3A229-1965-414E-AF54-F4C37AC7DF68}" dt="2026-01-27T01:28:22.504" v="869" actId="1035"/>
+      <pc:chgData name="Zhao Jin" userId="cd05a825-544c-438a-9ba1-08e63db50b47" providerId="ADAL" clId="{5DF3A229-1965-414E-AF54-F4C37AC7DF68}" dt="2026-01-27T03:45:09.152" v="935" actId="20577"/>
       <pc:docMkLst>
         <pc:docMk/>
       </pc:docMkLst>
@@ -267,6 +267,29 @@
         </pc:spChg>
       </pc:sldChg>
       <pc:sldChg chg="modSp mod">
+        <pc:chgData name="Zhao Jin" userId="cd05a825-544c-438a-9ba1-08e63db50b47" providerId="ADAL" clId="{5DF3A229-1965-414E-AF54-F4C37AC7DF68}" dt="2026-01-27T03:44:19.097" v="921" actId="20577"/>
+        <pc:sldMkLst>
+          <pc:docMk/>
+          <pc:sldMk cId="681224785" sldId="531"/>
+        </pc:sldMkLst>
+        <pc:spChg chg="mod">
+          <ac:chgData name="Zhao Jin" userId="cd05a825-544c-438a-9ba1-08e63db50b47" providerId="ADAL" clId="{5DF3A229-1965-414E-AF54-F4C37AC7DF68}" dt="2026-01-27T03:44:19.097" v="921" actId="20577"/>
+          <ac:spMkLst>
+            <pc:docMk/>
+            <pc:sldMk cId="681224785" sldId="531"/>
+            <ac:spMk id="8" creationId="{28132129-8005-4001-8A22-A53D9CDE0963}"/>
+          </ac:spMkLst>
+        </pc:spChg>
+        <pc:spChg chg="mod">
+          <ac:chgData name="Zhao Jin" userId="cd05a825-544c-438a-9ba1-08e63db50b47" providerId="ADAL" clId="{5DF3A229-1965-414E-AF54-F4C37AC7DF68}" dt="2026-01-27T03:44:15.225" v="917" actId="20577"/>
+          <ac:spMkLst>
+            <pc:docMk/>
+            <pc:sldMk cId="681224785" sldId="531"/>
+            <ac:spMk id="14" creationId="{85D4AA78-1A62-4644-8547-CB4E0AF1E1B4}"/>
+          </ac:spMkLst>
+        </pc:spChg>
+      </pc:sldChg>
+      <pc:sldChg chg="modSp mod">
         <pc:chgData name="Zhao Jin" userId="cd05a825-544c-438a-9ba1-08e63db50b47" providerId="ADAL" clId="{5DF3A229-1965-414E-AF54-F4C37AC7DF68}" dt="2026-01-26T08:14:18.238" v="444" actId="207"/>
         <pc:sldMkLst>
           <pc:docMk/>
@@ -300,6 +323,21 @@
             <pc:docMk/>
             <pc:sldMk cId="1617257579" sldId="548"/>
             <ac:spMk id="9" creationId="{00000000-0000-0000-0000-000000000000}"/>
+          </ac:spMkLst>
+        </pc:spChg>
+      </pc:sldChg>
+      <pc:sldChg chg="modSp mod">
+        <pc:chgData name="Zhao Jin" userId="cd05a825-544c-438a-9ba1-08e63db50b47" providerId="ADAL" clId="{5DF3A229-1965-414E-AF54-F4C37AC7DF68}" dt="2026-01-27T03:44:02.132" v="905" actId="20577"/>
+        <pc:sldMkLst>
+          <pc:docMk/>
+          <pc:sldMk cId="784668950" sldId="550"/>
+        </pc:sldMkLst>
+        <pc:spChg chg="mod">
+          <ac:chgData name="Zhao Jin" userId="cd05a825-544c-438a-9ba1-08e63db50b47" providerId="ADAL" clId="{5DF3A229-1965-414E-AF54-F4C37AC7DF68}" dt="2026-01-27T03:44:02.132" v="905" actId="20577"/>
+          <ac:spMkLst>
+            <pc:docMk/>
+            <pc:sldMk cId="784668950" sldId="550"/>
+            <ac:spMk id="13" creationId="{76AACBDB-EFE5-4782-AA9B-3760F5E7D3D7}"/>
           </ac:spMkLst>
         </pc:spChg>
       </pc:sldChg>
@@ -343,7 +381,7 @@
         </pc:spChg>
       </pc:sldChg>
       <pc:sldChg chg="addSp modSp mod addAnim delAnim modAnim">
-        <pc:chgData name="Zhao Jin" userId="cd05a825-544c-438a-9ba1-08e63db50b47" providerId="ADAL" clId="{5DF3A229-1965-414E-AF54-F4C37AC7DF68}" dt="2026-01-26T08:12:20.342" v="395" actId="207"/>
+        <pc:chgData name="Zhao Jin" userId="cd05a825-544c-438a-9ba1-08e63db50b47" providerId="ADAL" clId="{5DF3A229-1965-414E-AF54-F4C37AC7DF68}" dt="2026-01-27T03:43:49.965" v="898" actId="20577"/>
         <pc:sldMkLst>
           <pc:docMk/>
           <pc:sldMk cId="3764235702" sldId="552"/>
@@ -373,7 +411,15 @@
           </ac:spMkLst>
         </pc:spChg>
         <pc:spChg chg="mod">
-          <ac:chgData name="Zhao Jin" userId="cd05a825-544c-438a-9ba1-08e63db50b47" providerId="ADAL" clId="{5DF3A229-1965-414E-AF54-F4C37AC7DF68}" dt="2026-01-26T08:10:09.164" v="339" actId="14100"/>
+          <ac:chgData name="Zhao Jin" userId="cd05a825-544c-438a-9ba1-08e63db50b47" providerId="ADAL" clId="{5DF3A229-1965-414E-AF54-F4C37AC7DF68}" dt="2026-01-27T03:43:49.965" v="898" actId="20577"/>
+          <ac:spMkLst>
+            <pc:docMk/>
+            <pc:sldMk cId="3764235702" sldId="552"/>
+            <ac:spMk id="12" creationId="{59DCFA5F-5032-4FE0-9E21-E9E074B29DBC}"/>
+          </ac:spMkLst>
+        </pc:spChg>
+        <pc:spChg chg="mod">
+          <ac:chgData name="Zhao Jin" userId="cd05a825-544c-438a-9ba1-08e63db50b47" providerId="ADAL" clId="{5DF3A229-1965-414E-AF54-F4C37AC7DF68}" dt="2026-01-27T03:43:43.777" v="894" actId="20577"/>
           <ac:spMkLst>
             <pc:docMk/>
             <pc:sldMk cId="3764235702" sldId="552"/>
@@ -389,6 +435,74 @@
           </ac:picMkLst>
         </pc:picChg>
       </pc:sldChg>
+      <pc:sldChg chg="modSp mod">
+        <pc:chgData name="Zhao Jin" userId="cd05a825-544c-438a-9ba1-08e63db50b47" providerId="ADAL" clId="{5DF3A229-1965-414E-AF54-F4C37AC7DF68}" dt="2026-01-27T03:44:09.482" v="913" actId="20577"/>
+        <pc:sldMkLst>
+          <pc:docMk/>
+          <pc:sldMk cId="1452079182" sldId="553"/>
+        </pc:sldMkLst>
+        <pc:spChg chg="mod">
+          <ac:chgData name="Zhao Jin" userId="cd05a825-544c-438a-9ba1-08e63db50b47" providerId="ADAL" clId="{5DF3A229-1965-414E-AF54-F4C37AC7DF68}" dt="2026-01-27T03:44:09.482" v="913" actId="20577"/>
+          <ac:spMkLst>
+            <pc:docMk/>
+            <pc:sldMk cId="1452079182" sldId="553"/>
+            <ac:spMk id="9" creationId="{9900243D-4E9A-2132-2534-091BF461A5DE}"/>
+          </ac:spMkLst>
+        </pc:spChg>
+        <pc:spChg chg="mod">
+          <ac:chgData name="Zhao Jin" userId="cd05a825-544c-438a-9ba1-08e63db50b47" providerId="ADAL" clId="{5DF3A229-1965-414E-AF54-F4C37AC7DF68}" dt="2026-01-27T03:44:06.938" v="909" actId="20577"/>
+          <ac:spMkLst>
+            <pc:docMk/>
+            <pc:sldMk cId="1452079182" sldId="553"/>
+            <ac:spMk id="11" creationId="{AD26BEE8-8AD5-D992-89AD-328DDD2D9A92}"/>
+          </ac:spMkLst>
+        </pc:spChg>
+      </pc:sldChg>
+      <pc:sldChg chg="modSp mod">
+        <pc:chgData name="Zhao Jin" userId="cd05a825-544c-438a-9ba1-08e63db50b47" providerId="ADAL" clId="{5DF3A229-1965-414E-AF54-F4C37AC7DF68}" dt="2026-01-27T03:44:40.626" v="933" actId="20577"/>
+        <pc:sldMkLst>
+          <pc:docMk/>
+          <pc:sldMk cId="4044705258" sldId="556"/>
+        </pc:sldMkLst>
+        <pc:spChg chg="mod">
+          <ac:chgData name="Zhao Jin" userId="cd05a825-544c-438a-9ba1-08e63db50b47" providerId="ADAL" clId="{5DF3A229-1965-414E-AF54-F4C37AC7DF68}" dt="2026-01-27T03:44:40.626" v="933" actId="20577"/>
+          <ac:spMkLst>
+            <pc:docMk/>
+            <pc:sldMk cId="4044705258" sldId="556"/>
+            <ac:spMk id="13" creationId="{76AACBDB-EFE5-4782-AA9B-3760F5E7D3D7}"/>
+          </ac:spMkLst>
+        </pc:spChg>
+      </pc:sldChg>
+      <pc:sldChg chg="modSp mod">
+        <pc:chgData name="Zhao Jin" userId="cd05a825-544c-438a-9ba1-08e63db50b47" providerId="ADAL" clId="{5DF3A229-1965-414E-AF54-F4C37AC7DF68}" dt="2026-01-27T03:44:23.841" v="925" actId="20577"/>
+        <pc:sldMkLst>
+          <pc:docMk/>
+          <pc:sldMk cId="1521000033" sldId="559"/>
+        </pc:sldMkLst>
+        <pc:spChg chg="mod">
+          <ac:chgData name="Zhao Jin" userId="cd05a825-544c-438a-9ba1-08e63db50b47" providerId="ADAL" clId="{5DF3A229-1965-414E-AF54-F4C37AC7DF68}" dt="2026-01-27T03:44:23.841" v="925" actId="20577"/>
+          <ac:spMkLst>
+            <pc:docMk/>
+            <pc:sldMk cId="1521000033" sldId="559"/>
+            <ac:spMk id="13" creationId="{76AACBDB-EFE5-4782-AA9B-3760F5E7D3D7}"/>
+          </ac:spMkLst>
+        </pc:spChg>
+      </pc:sldChg>
+      <pc:sldChg chg="modSp">
+        <pc:chgData name="Zhao Jin" userId="cd05a825-544c-438a-9ba1-08e63db50b47" providerId="ADAL" clId="{5DF3A229-1965-414E-AF54-F4C37AC7DF68}" dt="2026-01-27T03:45:09.152" v="935" actId="20577"/>
+        <pc:sldMkLst>
+          <pc:docMk/>
+          <pc:sldMk cId="1311126165" sldId="566"/>
+        </pc:sldMkLst>
+        <pc:spChg chg="mod">
+          <ac:chgData name="Zhao Jin" userId="cd05a825-544c-438a-9ba1-08e63db50b47" providerId="ADAL" clId="{5DF3A229-1965-414E-AF54-F4C37AC7DF68}" dt="2026-01-27T03:45:09.152" v="935" actId="20577"/>
+          <ac:spMkLst>
+            <pc:docMk/>
+            <pc:sldMk cId="1311126165" sldId="566"/>
+            <ac:spMk id="6" creationId="{1FF2E942-A5DB-38D5-B40D-97490EC324D2}"/>
+          </ac:spMkLst>
+        </pc:spChg>
+      </pc:sldChg>
       <pc:sldChg chg="modSp mod addAnim delAnim modAnim">
         <pc:chgData name="Zhao Jin" userId="cd05a825-544c-438a-9ba1-08e63db50b47" providerId="ADAL" clId="{5DF3A229-1965-414E-AF54-F4C37AC7DF68}" dt="2026-01-26T08:16:10.956" v="518"/>
         <pc:sldMkLst>
@@ -401,6 +515,21 @@
             <pc:docMk/>
             <pc:sldMk cId="2072030558" sldId="568"/>
             <ac:spMk id="10" creationId="{00000000-0000-0000-0000-000000000000}"/>
+          </ac:spMkLst>
+        </pc:spChg>
+      </pc:sldChg>
+      <pc:sldChg chg="modSp mod">
+        <pc:chgData name="Zhao Jin" userId="cd05a825-544c-438a-9ba1-08e63db50b47" providerId="ADAL" clId="{5DF3A229-1965-414E-AF54-F4C37AC7DF68}" dt="2026-01-27T03:42:42.703" v="879" actId="20577"/>
+        <pc:sldMkLst>
+          <pc:docMk/>
+          <pc:sldMk cId="2848702153" sldId="571"/>
+        </pc:sldMkLst>
+        <pc:spChg chg="mod">
+          <ac:chgData name="Zhao Jin" userId="cd05a825-544c-438a-9ba1-08e63db50b47" providerId="ADAL" clId="{5DF3A229-1965-414E-AF54-F4C37AC7DF68}" dt="2026-01-27T03:42:42.703" v="879" actId="20577"/>
+          <ac:spMkLst>
+            <pc:docMk/>
+            <pc:sldMk cId="2848702153" sldId="571"/>
+            <ac:spMk id="5" creationId="{8F49DB17-F9A7-CF8E-AF03-AE4BE2DC10A0}"/>
           </ac:spMkLst>
         </pc:spChg>
       </pc:sldChg>
@@ -566,6 +695,21 @@
             <pc:docMk/>
             <pc:sldMk cId="3082655292" sldId="575"/>
             <ac:spMk id="9" creationId="{7B735FE2-51ED-3F7A-C539-BA0C600C9DFF}"/>
+          </ac:spMkLst>
+        </pc:spChg>
+      </pc:sldChg>
+      <pc:sldChg chg="modSp mod">
+        <pc:chgData name="Zhao Jin" userId="cd05a825-544c-438a-9ba1-08e63db50b47" providerId="ADAL" clId="{5DF3A229-1965-414E-AF54-F4C37AC7DF68}" dt="2026-01-27T03:44:33.611" v="929" actId="20577"/>
+        <pc:sldMkLst>
+          <pc:docMk/>
+          <pc:sldMk cId="2276019218" sldId="576"/>
+        </pc:sldMkLst>
+        <pc:spChg chg="mod">
+          <ac:chgData name="Zhao Jin" userId="cd05a825-544c-438a-9ba1-08e63db50b47" providerId="ADAL" clId="{5DF3A229-1965-414E-AF54-F4C37AC7DF68}" dt="2026-01-27T03:44:33.611" v="929" actId="20577"/>
+          <ac:spMkLst>
+            <pc:docMk/>
+            <pc:sldMk cId="2276019218" sldId="576"/>
+            <ac:spMk id="9" creationId="{4DB6124C-A567-835A-29D2-3B8EE71A4FDA}"/>
           </ac:spMkLst>
         </pc:spChg>
       </pc:sldChg>
@@ -11402,12 +11546,11 @@
               <a:t>main</a:t>
             </a:r>
             <a:r>
-              <a:rPr lang="en-US" b="1" i="0" dirty="0">
-                <a:effectLst/>
+              <a:rPr lang="en-US" b="1" dirty="0">
                 <a:latin typeface="Courier New" panose="02070309020205020404" pitchFamily="49" charset="0"/>
                 <a:cs typeface="Courier New" panose="02070309020205020404" pitchFamily="49" charset="0"/>
               </a:rPr>
-              <a:t>()</a:t>
+              <a:t>(void)</a:t>
             </a:r>
             <a:r>
               <a:rPr lang="en-US" b="1" i="0" dirty="0">
@@ -11613,7 +11756,7 @@
                 <a:latin typeface="Courier New" panose="02070309020205020404" pitchFamily="49" charset="0"/>
                 <a:cs typeface="Courier New" panose="02070309020205020404" pitchFamily="49" charset="0"/>
               </a:rPr>
-              <a:t>()</a:t>
+              <a:t>(void)</a:t>
             </a:r>
             <a:r>
               <a:rPr lang="en-US" b="1" i="0" dirty="0">
@@ -14666,7 +14809,7 @@
                 <a:latin typeface="Courier New" panose="02070309020205020404" pitchFamily="49" charset="0"/>
                 <a:cs typeface="Courier New" panose="02070309020205020404" pitchFamily="49" charset="0"/>
               </a:rPr>
-              <a:t>()</a:t>
+              <a:t>(void)</a:t>
             </a:r>
             <a:r>
               <a:rPr lang="en-US" b="1" dirty="0">
@@ -15956,16 +16099,20 @@
               <a:t>main</a:t>
             </a:r>
             <a:r>
-              <a:rPr lang="en-US" b="1" i="0" dirty="0">
-                <a:solidFill>
-                  <a:schemeClr val="tx1"/>
-                </a:solidFill>
-                <a:effectLst/>
+              <a:rPr lang="en-US" b="1" dirty="0">
                 <a:latin typeface="Courier New" panose="02070309020205020404" pitchFamily="49" charset="0"/>
                 <a:cs typeface="Courier New" panose="02070309020205020404" pitchFamily="49" charset="0"/>
               </a:rPr>
-              <a:t>()</a:t>
-            </a:r>
+              <a:t>(void)</a:t>
+            </a:r>
+            <a:endParaRPr lang="en-US" b="1" i="0" dirty="0">
+              <a:solidFill>
+                <a:schemeClr val="tx1"/>
+              </a:solidFill>
+              <a:effectLst/>
+              <a:latin typeface="Courier New" panose="02070309020205020404" pitchFamily="49" charset="0"/>
+              <a:cs typeface="Courier New" panose="02070309020205020404" pitchFamily="49" charset="0"/>
+            </a:endParaRPr>
           </a:p>
           <a:p>
             <a:pPr>
@@ -16997,7 +17144,7 @@
                 <a:latin typeface="Courier New" panose="02070309020205020404" pitchFamily="49" charset="0"/>
                 <a:cs typeface="Courier New" panose="02070309020205020404" pitchFamily="49" charset="0"/>
               </a:rPr>
-              <a:t>()</a:t>
+              <a:t>(void)</a:t>
             </a:r>
             <a:r>
               <a:rPr lang="en-US" b="1" i="0" dirty="0">
@@ -17721,7 +17868,7 @@
                 <a:latin typeface="Courier New" panose="02070309020205020404" pitchFamily="49" charset="0"/>
                 <a:cs typeface="Courier New" panose="02070309020205020404" pitchFamily="49" charset="0"/>
               </a:rPr>
-              <a:t>()</a:t>
+              <a:t>(void)</a:t>
             </a:r>
             <a:r>
               <a:rPr lang="en-US" b="1" i="0" dirty="0">
@@ -19771,7 +19918,7 @@
                 <a:latin typeface="Courier New" panose="02070309020205020404" pitchFamily="49" charset="0"/>
                 <a:cs typeface="Courier New" panose="02070309020205020404" pitchFamily="49" charset="0"/>
               </a:rPr>
-              <a:t>()</a:t>
+              <a:t>(void)</a:t>
             </a:r>
             <a:r>
               <a:rPr lang="en-US" b="1" i="0" dirty="0">
@@ -20507,7 +20654,7 @@
                 <a:latin typeface="Courier New" panose="02070309020205020404" pitchFamily="49" charset="0"/>
                 <a:cs typeface="Courier New" panose="02070309020205020404" pitchFamily="49" charset="0"/>
               </a:rPr>
-              <a:t>()</a:t>
+              <a:t>(void)</a:t>
             </a:r>
             <a:r>
               <a:rPr lang="en-US" b="1" i="0" dirty="0">
@@ -22373,7 +22520,7 @@
                 <a:latin typeface="Courier New" panose="02070309020205020404" pitchFamily="49" charset="0"/>
                 <a:cs typeface="Courier New" panose="02070309020205020404" pitchFamily="49" charset="0"/>
               </a:rPr>
-              <a:t> main()</a:t>
+              <a:t> main(void)</a:t>
             </a:r>
           </a:p>
           <a:p>
@@ -23569,7 +23716,7 @@
           <a:p>
             <a:r>
               <a:rPr lang="en-US" dirty="0"/>
-              <a:t>cs1010_print_long();</a:t>
+              <a:t>cs1010_read_long();</a:t>
             </a:r>
           </a:p>
           <a:p>
@@ -25016,7 +25163,7 @@
                 <a:latin typeface="Courier New" panose="02070309020205020404" pitchFamily="49" charset="0"/>
                 <a:cs typeface="Courier New" panose="02070309020205020404" pitchFamily="49" charset="0"/>
               </a:rPr>
-              <a:t>()</a:t>
+              <a:t>(void)</a:t>
             </a:r>
           </a:p>
           <a:p>
@@ -30491,7 +30638,17 @@
                 <a:latin typeface="+mj-lt"/>
                 <a:cs typeface="Courier New" pitchFamily="49" charset="0"/>
               </a:rPr>
-              <a:t>half is 1</a:t>
+              <a:t>half </a:t>
+            </a:r>
+            <a:r>
+              <a:rPr lang="en-US" sz="2000">
+                <a:solidFill>
+                  <a:srgbClr val="7030A0"/>
+                </a:solidFill>
+                <a:latin typeface="+mj-lt"/>
+                <a:cs typeface="Courier New" pitchFamily="49" charset="0"/>
+              </a:rPr>
+              <a:t>is 1.0</a:t>
             </a:r>
             <a:endParaRPr lang="en-SG" sz="2000" dirty="0">
               <a:solidFill>
